--- a/assets/figures-editable/c1-c2/c2-e24.pptx
+++ b/assets/figures-editable/c1-c2/c2-e24.pptx
@@ -7,7 +7,7 @@
   <p:sldIdLst>
     <p:sldId id="256" r:id="rId7"/>
   </p:sldIdLst>
-  <p:sldSz cx="11948160" cy="7924799" type="screen4x3"/>
+  <p:sldSz cx="12191695" cy="6858000" type="screen4x3"/>
   <p:notesSz cx="6858000" cy="9144000"/>
   <p:defaultTextStyle>
     <a:defPPr>
@@ -3098,14 +3098,14 @@
       <p:grpSpPr/>
       <p:sp>
         <p:nvSpPr>
-          <p:cNvPr id="2" name="text1" descr="sci-ppt:C2-E24-001"/>
+          <p:cNvPr id="2" name="C2-E24 text 0" descr="sci-ppt:o000"/>
           <p:cNvSpPr txBox="1"/>
           <p:nvPr/>
         </p:nvSpPr>
         <p:spPr>
           <a:xfrm>
-            <a:off x="316992" y="268224"/>
-            <a:ext cx="11277600" cy="359054"/>
+            <a:off x="274320" y="118872"/>
+            <a:ext cx="11612880" cy="340105"/>
           </a:xfrm>
           <a:prstGeom prst="rect">
             <a:avLst/>
@@ -3114,7 +3114,7 @@
           <a:effectLst/>
         </p:spPr>
         <p:txBody>
-          <a:bodyPr wrap="none" lIns="27432" rIns="27432" tIns="18288" bIns="18288" anchor="ctr">
+          <a:bodyPr wrap="none" lIns="18288" rIns="18288" tIns="18288" bIns="18288" anchor="t">
             <a:spAutoFit/>
           </a:bodyPr>
           <a:lstStyle/>
@@ -3125,34 +3125,31 @@
               </a:spcAft>
             </a:pPr>
             <a:r>
-              <a:rPr sz="1823" b="0" i="0">
+              <a:rPr sz="1900" b="1" i="0">
                 <a:solidFill>
                   <a:srgbClr val="8EDBD4"/>
                 </a:solidFill>
                 <a:latin typeface="Arial"/>
               </a:rPr>
-              <a:t>C2-E24 | Physical-variable diagram</a:t>
-            </a:r>
-          </a:p>
-        </p:txBody>
-      </p:sp>
-      <p:sp>
-        <p:nvSpPr>
-          <p:cNvPr id="3" name="rect2" descr="sci-ppt:C2-E24-002"/>
-          <p:cNvSpPr/>
+              <a:t>C2-E24 · Ideal-mixture constitutive control and required refinement</a:t>
+            </a:r>
+          </a:p>
+        </p:txBody>
+      </p:sp>
+      <p:cxnSp>
+        <p:nvCxnSpPr>
+          <p:cNvPr id="3" name="C2-E24 line 1" descr="sci-ppt:o001"/>
+          <p:cNvCxnSpPr/>
           <p:nvPr/>
-        </p:nvSpPr>
-        <p:spPr>
-          <a:xfrm>
-            <a:off x="731520" y="1463040"/>
-            <a:ext cx="3413760" cy="1158240"/>
-          </a:xfrm>
-          <a:prstGeom prst="rect">
-            <a:avLst/>
-          </a:prstGeom>
-          <a:solidFill>
-            <a:srgbClr val="213E4B"/>
-          </a:solidFill>
+        </p:nvCxnSpPr>
+        <p:spPr>
+          <a:xfrm>
+            <a:off x="914400" y="5029200"/>
+            <a:ext cx="6035040" cy="0"/>
+          </a:xfrm>
+          <a:prstGeom prst="line">
+            <a:avLst/>
+          </a:prstGeom>
           <a:ln w="19050">
             <a:solidFill>
               <a:srgbClr val="B4C7D2"/>
@@ -3160,95 +3157,21 @@
           </a:ln>
           <a:effectLst/>
         </p:spPr>
-        <p:txBody>
-          <a:bodyPr rtlCol="0" anchor="ctr"/>
-          <a:lstStyle/>
-          <a:p>
-            <a:pPr algn="ctr"/>
-          </a:p>
-        </p:txBody>
-      </p:sp>
-      <p:sp>
-        <p:nvSpPr>
-          <p:cNvPr id="4" name="text3" descr="sci-ppt:C2-E24-003"/>
-          <p:cNvSpPr txBox="1"/>
-          <p:nvPr/>
-        </p:nvSpPr>
-        <p:spPr>
-          <a:xfrm>
-            <a:off x="853440" y="1584960"/>
-            <a:ext cx="3230880" cy="340156"/>
-          </a:xfrm>
-          <a:prstGeom prst="rect">
-            <a:avLst/>
-          </a:prstGeom>
-          <a:noFill/>
-          <a:effectLst/>
-        </p:spPr>
-        <p:txBody>
-          <a:bodyPr wrap="none" lIns="27432" rIns="27432" tIns="18288" bIns="18288" anchor="ctr">
-            <a:spAutoFit/>
-          </a:bodyPr>
-          <a:lstStyle/>
-          <a:p>
-            <a:pPr algn="l">
-              <a:spcAft>
-                <a:spcPts val="0"/>
-              </a:spcAft>
-            </a:pPr>
-            <a:r>
-              <a:rPr sz="1728" b="0" i="0">
-                <a:solidFill>
-                  <a:srgbClr val="E7F0F3"/>
-                </a:solidFill>
-                <a:latin typeface="Arial"/>
-              </a:rPr>
-              <a:t>Species masses m_v,s</a:t>
-            </a:r>
-          </a:p>
-        </p:txBody>
-      </p:sp>
+      </p:cxnSp>
       <p:cxnSp>
         <p:nvCxnSpPr>
-          <p:cNvPr id="5" name="arrow4" descr="sci-ppt:C2-E24-004"/>
+          <p:cNvPr id="4" name="C2-E24 line 2" descr="sci-ppt:o002"/>
           <p:cNvCxnSpPr/>
           <p:nvPr/>
         </p:nvCxnSpPr>
         <p:spPr>
           <a:xfrm>
-            <a:off x="2438400" y="2743200"/>
-            <a:ext cx="3535680" cy="975360"/>
+            <a:off x="914400" y="1371600"/>
+            <a:ext cx="0" cy="3657600"/>
           </a:xfrm>
           <a:prstGeom prst="line">
             <a:avLst/>
           </a:prstGeom>
-          <a:ln w="25400">
-            <a:solidFill>
-              <a:srgbClr val="8EDBD4"/>
-            </a:solidFill>
-            <a:headEnd type="none" w="med" len="med"/>
-            <a:tailEnd type="triangle" w="med" len="med"/>
-          </a:ln>
-          <a:effectLst/>
-        </p:spPr>
-      </p:cxnSp>
-      <p:sp>
-        <p:nvSpPr>
-          <p:cNvPr id="6" name="rect5" descr="sci-ppt:C2-E24-005"/>
-          <p:cNvSpPr/>
-          <p:nvPr/>
-        </p:nvSpPr>
-        <p:spPr>
-          <a:xfrm>
-            <a:off x="4511040" y="1463040"/>
-            <a:ext cx="3413760" cy="1158240"/>
-          </a:xfrm>
-          <a:prstGeom prst="rect">
-            <a:avLst/>
-          </a:prstGeom>
-          <a:solidFill>
-            <a:srgbClr val="213E4B"/>
-          </a:solidFill>
           <a:ln w="19050">
             <a:solidFill>
               <a:srgbClr val="B4C7D2"/>
@@ -3256,24 +3179,61 @@
           </a:ln>
           <a:effectLst/>
         </p:spPr>
-        <p:txBody>
-          <a:bodyPr rtlCol="0" anchor="ctr"/>
-          <a:lstStyle/>
-          <a:p>
-            <a:pPr algn="ctr"/>
-          </a:p>
-        </p:txBody>
-      </p:sp>
-      <p:sp>
-        <p:nvSpPr>
-          <p:cNvPr id="7" name="text6" descr="sci-ppt:C2-E24-006"/>
+      </p:cxnSp>
+      <p:cxnSp>
+        <p:nvCxnSpPr>
+          <p:cNvPr id="5" name="C2-E24 line 3" descr="sci-ppt:o003"/>
+          <p:cNvCxnSpPr/>
+          <p:nvPr/>
+        </p:nvCxnSpPr>
+        <p:spPr>
+          <a:xfrm>
+            <a:off x="914400" y="5029200"/>
+            <a:ext cx="0" cy="64008"/>
+          </a:xfrm>
+          <a:prstGeom prst="line">
+            <a:avLst/>
+          </a:prstGeom>
+          <a:ln w="12700">
+            <a:solidFill>
+              <a:srgbClr val="B4C7D2"/>
+            </a:solidFill>
+          </a:ln>
+          <a:effectLst/>
+        </p:spPr>
+      </p:cxnSp>
+      <p:cxnSp>
+        <p:nvCxnSpPr>
+          <p:cNvPr id="6" name="C2-E24 line 4" descr="sci-ppt:o004"/>
+          <p:cNvCxnSpPr/>
+          <p:nvPr/>
+        </p:nvCxnSpPr>
+        <p:spPr>
+          <a:xfrm>
+            <a:off x="914400" y="1371600"/>
+            <a:ext cx="0" cy="3657600"/>
+          </a:xfrm>
+          <a:prstGeom prst="line">
+            <a:avLst/>
+          </a:prstGeom>
+          <a:ln w="7620">
+            <a:solidFill>
+              <a:srgbClr val="2E4756"/>
+            </a:solidFill>
+          </a:ln>
+          <a:effectLst/>
+        </p:spPr>
+      </p:cxnSp>
+      <p:sp>
+        <p:nvSpPr>
+          <p:cNvPr id="7" name="C2-E24 text 5" descr="sci-ppt:o005"/>
           <p:cNvSpPr txBox="1"/>
           <p:nvPr/>
         </p:nvSpPr>
         <p:spPr>
           <a:xfrm>
-            <a:off x="4632960" y="1584960"/>
-            <a:ext cx="3230880" cy="340156"/>
+            <a:off x="457200" y="5111496"/>
+            <a:ext cx="914400" cy="208407"/>
           </a:xfrm>
           <a:prstGeom prst="rect">
             <a:avLst/>
@@ -3282,7 +3242,865 @@
           <a:effectLst/>
         </p:spPr>
         <p:txBody>
-          <a:bodyPr wrap="none" lIns="27432" rIns="27432" tIns="18288" bIns="18288" anchor="ctr">
+          <a:bodyPr wrap="none" lIns="18288" rIns="18288" tIns="18288" bIns="18288" anchor="t">
+            <a:spAutoFit/>
+          </a:bodyPr>
+          <a:lstStyle/>
+          <a:p>
+            <a:pPr algn="ctr">
+              <a:spcAft>
+                <a:spcPts val="0"/>
+              </a:spcAft>
+            </a:pPr>
+            <a:r>
+              <a:rPr sz="1050" b="0" i="0">
+                <a:solidFill>
+                  <a:srgbClr val="B4C7D2"/>
+                </a:solidFill>
+                <a:latin typeface="Arial"/>
+              </a:rPr>
+              <a:t>5</a:t>
+            </a:r>
+          </a:p>
+        </p:txBody>
+      </p:sp>
+      <p:cxnSp>
+        <p:nvCxnSpPr>
+          <p:cNvPr id="8" name="C2-E24 line 6" descr="sci-ppt:o006"/>
+          <p:cNvCxnSpPr/>
+          <p:nvPr/>
+        </p:nvCxnSpPr>
+        <p:spPr>
+          <a:xfrm>
+            <a:off x="2423160" y="5029200"/>
+            <a:ext cx="0" cy="64008"/>
+          </a:xfrm>
+          <a:prstGeom prst="line">
+            <a:avLst/>
+          </a:prstGeom>
+          <a:ln w="12700">
+            <a:solidFill>
+              <a:srgbClr val="B4C7D2"/>
+            </a:solidFill>
+          </a:ln>
+          <a:effectLst/>
+        </p:spPr>
+      </p:cxnSp>
+      <p:cxnSp>
+        <p:nvCxnSpPr>
+          <p:cNvPr id="9" name="C2-E24 line 7" descr="sci-ppt:o007"/>
+          <p:cNvCxnSpPr/>
+          <p:nvPr/>
+        </p:nvCxnSpPr>
+        <p:spPr>
+          <a:xfrm>
+            <a:off x="2423160" y="1371600"/>
+            <a:ext cx="0" cy="3657600"/>
+          </a:xfrm>
+          <a:prstGeom prst="line">
+            <a:avLst/>
+          </a:prstGeom>
+          <a:ln w="7620">
+            <a:solidFill>
+              <a:srgbClr val="2E4756"/>
+            </a:solidFill>
+          </a:ln>
+          <a:effectLst/>
+        </p:spPr>
+      </p:cxnSp>
+      <p:sp>
+        <p:nvSpPr>
+          <p:cNvPr id="10" name="C2-E24 text 8" descr="sci-ppt:o008"/>
+          <p:cNvSpPr txBox="1"/>
+          <p:nvPr/>
+        </p:nvSpPr>
+        <p:spPr>
+          <a:xfrm>
+            <a:off x="1965960" y="5111496"/>
+            <a:ext cx="914400" cy="208407"/>
+          </a:xfrm>
+          <a:prstGeom prst="rect">
+            <a:avLst/>
+          </a:prstGeom>
+          <a:noFill/>
+          <a:effectLst/>
+        </p:spPr>
+        <p:txBody>
+          <a:bodyPr wrap="none" lIns="18288" rIns="18288" tIns="18288" bIns="18288" anchor="t">
+            <a:spAutoFit/>
+          </a:bodyPr>
+          <a:lstStyle/>
+          <a:p>
+            <a:pPr algn="ctr">
+              <a:spcAft>
+                <a:spcPts val="0"/>
+              </a:spcAft>
+            </a:pPr>
+            <a:r>
+              <a:rPr sz="1050" b="0" i="0">
+                <a:solidFill>
+                  <a:srgbClr val="B4C7D2"/>
+                </a:solidFill>
+                <a:latin typeface="Arial"/>
+              </a:rPr>
+              <a:t>10</a:t>
+            </a:r>
+          </a:p>
+        </p:txBody>
+      </p:sp>
+      <p:cxnSp>
+        <p:nvCxnSpPr>
+          <p:cNvPr id="11" name="C2-E24 line 9" descr="sci-ppt:o009"/>
+          <p:cNvCxnSpPr/>
+          <p:nvPr/>
+        </p:nvCxnSpPr>
+        <p:spPr>
+          <a:xfrm>
+            <a:off x="3931920" y="5029200"/>
+            <a:ext cx="0" cy="64008"/>
+          </a:xfrm>
+          <a:prstGeom prst="line">
+            <a:avLst/>
+          </a:prstGeom>
+          <a:ln w="12700">
+            <a:solidFill>
+              <a:srgbClr val="B4C7D2"/>
+            </a:solidFill>
+          </a:ln>
+          <a:effectLst/>
+        </p:spPr>
+      </p:cxnSp>
+      <p:cxnSp>
+        <p:nvCxnSpPr>
+          <p:cNvPr id="12" name="C2-E24 line 10" descr="sci-ppt:o010"/>
+          <p:cNvCxnSpPr/>
+          <p:nvPr/>
+        </p:nvCxnSpPr>
+        <p:spPr>
+          <a:xfrm>
+            <a:off x="3931920" y="1371600"/>
+            <a:ext cx="0" cy="3657600"/>
+          </a:xfrm>
+          <a:prstGeom prst="line">
+            <a:avLst/>
+          </a:prstGeom>
+          <a:ln w="7620">
+            <a:solidFill>
+              <a:srgbClr val="2E4756"/>
+            </a:solidFill>
+          </a:ln>
+          <a:effectLst/>
+        </p:spPr>
+      </p:cxnSp>
+      <p:sp>
+        <p:nvSpPr>
+          <p:cNvPr id="13" name="C2-E24 text 11" descr="sci-ppt:o011"/>
+          <p:cNvSpPr txBox="1"/>
+          <p:nvPr/>
+        </p:nvSpPr>
+        <p:spPr>
+          <a:xfrm>
+            <a:off x="3474720" y="5111496"/>
+            <a:ext cx="914400" cy="208407"/>
+          </a:xfrm>
+          <a:prstGeom prst="rect">
+            <a:avLst/>
+          </a:prstGeom>
+          <a:noFill/>
+          <a:effectLst/>
+        </p:spPr>
+        <p:txBody>
+          <a:bodyPr wrap="none" lIns="18288" rIns="18288" tIns="18288" bIns="18288" anchor="t">
+            <a:spAutoFit/>
+          </a:bodyPr>
+          <a:lstStyle/>
+          <a:p>
+            <a:pPr algn="ctr">
+              <a:spcAft>
+                <a:spcPts val="0"/>
+              </a:spcAft>
+            </a:pPr>
+            <a:r>
+              <a:rPr sz="1050" b="0" i="0">
+                <a:solidFill>
+                  <a:srgbClr val="B4C7D2"/>
+                </a:solidFill>
+                <a:latin typeface="Arial"/>
+              </a:rPr>
+              <a:t>20</a:t>
+            </a:r>
+          </a:p>
+        </p:txBody>
+      </p:sp>
+      <p:cxnSp>
+        <p:nvCxnSpPr>
+          <p:cNvPr id="14" name="C2-E24 line 12" descr="sci-ppt:o012"/>
+          <p:cNvCxnSpPr/>
+          <p:nvPr/>
+        </p:nvCxnSpPr>
+        <p:spPr>
+          <a:xfrm>
+            <a:off x="5440679" y="5029200"/>
+            <a:ext cx="0" cy="64008"/>
+          </a:xfrm>
+          <a:prstGeom prst="line">
+            <a:avLst/>
+          </a:prstGeom>
+          <a:ln w="12700">
+            <a:solidFill>
+              <a:srgbClr val="B4C7D2"/>
+            </a:solidFill>
+          </a:ln>
+          <a:effectLst/>
+        </p:spPr>
+      </p:cxnSp>
+      <p:cxnSp>
+        <p:nvCxnSpPr>
+          <p:cNvPr id="15" name="C2-E24 line 13" descr="sci-ppt:o013"/>
+          <p:cNvCxnSpPr/>
+          <p:nvPr/>
+        </p:nvCxnSpPr>
+        <p:spPr>
+          <a:xfrm>
+            <a:off x="5440679" y="1371600"/>
+            <a:ext cx="0" cy="3657600"/>
+          </a:xfrm>
+          <a:prstGeom prst="line">
+            <a:avLst/>
+          </a:prstGeom>
+          <a:ln w="7620">
+            <a:solidFill>
+              <a:srgbClr val="2E4756"/>
+            </a:solidFill>
+          </a:ln>
+          <a:effectLst/>
+        </p:spPr>
+      </p:cxnSp>
+      <p:sp>
+        <p:nvSpPr>
+          <p:cNvPr id="16" name="C2-E24 text 14" descr="sci-ppt:o014"/>
+          <p:cNvSpPr txBox="1"/>
+          <p:nvPr/>
+        </p:nvSpPr>
+        <p:spPr>
+          <a:xfrm>
+            <a:off x="4983479" y="5111496"/>
+            <a:ext cx="914400" cy="208407"/>
+          </a:xfrm>
+          <a:prstGeom prst="rect">
+            <a:avLst/>
+          </a:prstGeom>
+          <a:noFill/>
+          <a:effectLst/>
+        </p:spPr>
+        <p:txBody>
+          <a:bodyPr wrap="none" lIns="18288" rIns="18288" tIns="18288" bIns="18288" anchor="t">
+            <a:spAutoFit/>
+          </a:bodyPr>
+          <a:lstStyle/>
+          <a:p>
+            <a:pPr algn="ctr">
+              <a:spcAft>
+                <a:spcPts val="0"/>
+              </a:spcAft>
+            </a:pPr>
+            <a:r>
+              <a:rPr sz="1050" b="0" i="0">
+                <a:solidFill>
+                  <a:srgbClr val="B4C7D2"/>
+                </a:solidFill>
+                <a:latin typeface="Arial"/>
+              </a:rPr>
+              <a:t>40</a:t>
+            </a:r>
+          </a:p>
+        </p:txBody>
+      </p:sp>
+      <p:cxnSp>
+        <p:nvCxnSpPr>
+          <p:cNvPr id="17" name="C2-E24 line 15" descr="sci-ppt:o015"/>
+          <p:cNvCxnSpPr/>
+          <p:nvPr/>
+        </p:nvCxnSpPr>
+        <p:spPr>
+          <a:xfrm>
+            <a:off x="6949440" y="5029200"/>
+            <a:ext cx="0" cy="64008"/>
+          </a:xfrm>
+          <a:prstGeom prst="line">
+            <a:avLst/>
+          </a:prstGeom>
+          <a:ln w="12700">
+            <a:solidFill>
+              <a:srgbClr val="B4C7D2"/>
+            </a:solidFill>
+          </a:ln>
+          <a:effectLst/>
+        </p:spPr>
+      </p:cxnSp>
+      <p:cxnSp>
+        <p:nvCxnSpPr>
+          <p:cNvPr id="18" name="C2-E24 line 16" descr="sci-ppt:o016"/>
+          <p:cNvCxnSpPr/>
+          <p:nvPr/>
+        </p:nvCxnSpPr>
+        <p:spPr>
+          <a:xfrm>
+            <a:off x="6949440" y="1371600"/>
+            <a:ext cx="0" cy="3657600"/>
+          </a:xfrm>
+          <a:prstGeom prst="line">
+            <a:avLst/>
+          </a:prstGeom>
+          <a:ln w="7620">
+            <a:solidFill>
+              <a:srgbClr val="2E4756"/>
+            </a:solidFill>
+          </a:ln>
+          <a:effectLst/>
+        </p:spPr>
+      </p:cxnSp>
+      <p:sp>
+        <p:nvSpPr>
+          <p:cNvPr id="19" name="C2-E24 text 17" descr="sci-ppt:o017"/>
+          <p:cNvSpPr txBox="1"/>
+          <p:nvPr/>
+        </p:nvSpPr>
+        <p:spPr>
+          <a:xfrm>
+            <a:off x="6492240" y="5111496"/>
+            <a:ext cx="914400" cy="208407"/>
+          </a:xfrm>
+          <a:prstGeom prst="rect">
+            <a:avLst/>
+          </a:prstGeom>
+          <a:noFill/>
+          <a:effectLst/>
+        </p:spPr>
+        <p:txBody>
+          <a:bodyPr wrap="none" lIns="18288" rIns="18288" tIns="18288" bIns="18288" anchor="t">
+            <a:spAutoFit/>
+          </a:bodyPr>
+          <a:lstStyle/>
+          <a:p>
+            <a:pPr algn="ctr">
+              <a:spcAft>
+                <a:spcPts val="0"/>
+              </a:spcAft>
+            </a:pPr>
+            <a:r>
+              <a:rPr sz="1050" b="0" i="0">
+                <a:solidFill>
+                  <a:srgbClr val="B4C7D2"/>
+                </a:solidFill>
+                <a:latin typeface="Arial"/>
+              </a:rPr>
+              <a:t>80</a:t>
+            </a:r>
+          </a:p>
+        </p:txBody>
+      </p:sp>
+      <p:cxnSp>
+        <p:nvCxnSpPr>
+          <p:cNvPr id="20" name="C2-E24 line 18" descr="sci-ppt:o018"/>
+          <p:cNvCxnSpPr/>
+          <p:nvPr/>
+        </p:nvCxnSpPr>
+        <p:spPr>
+          <a:xfrm>
+            <a:off x="850392" y="5029200"/>
+            <a:ext cx="64008" cy="0"/>
+          </a:xfrm>
+          <a:prstGeom prst="line">
+            <a:avLst/>
+          </a:prstGeom>
+          <a:ln w="12700">
+            <a:solidFill>
+              <a:srgbClr val="B4C7D2"/>
+            </a:solidFill>
+          </a:ln>
+          <a:effectLst/>
+        </p:spPr>
+      </p:cxnSp>
+      <p:cxnSp>
+        <p:nvCxnSpPr>
+          <p:cNvPr id="21" name="C2-E24 line 19" descr="sci-ppt:o019"/>
+          <p:cNvCxnSpPr/>
+          <p:nvPr/>
+        </p:nvCxnSpPr>
+        <p:spPr>
+          <a:xfrm>
+            <a:off x="850392" y="4297680"/>
+            <a:ext cx="64008" cy="0"/>
+          </a:xfrm>
+          <a:prstGeom prst="line">
+            <a:avLst/>
+          </a:prstGeom>
+          <a:ln w="12700">
+            <a:solidFill>
+              <a:srgbClr val="B4C7D2"/>
+            </a:solidFill>
+          </a:ln>
+          <a:effectLst/>
+        </p:spPr>
+      </p:cxnSp>
+      <p:cxnSp>
+        <p:nvCxnSpPr>
+          <p:cNvPr id="22" name="C2-E24 line 20" descr="sci-ppt:o020"/>
+          <p:cNvCxnSpPr/>
+          <p:nvPr/>
+        </p:nvCxnSpPr>
+        <p:spPr>
+          <a:xfrm>
+            <a:off x="914400" y="4297680"/>
+            <a:ext cx="6035040" cy="0"/>
+          </a:xfrm>
+          <a:prstGeom prst="line">
+            <a:avLst/>
+          </a:prstGeom>
+          <a:ln w="7620">
+            <a:solidFill>
+              <a:srgbClr val="2E4756"/>
+            </a:solidFill>
+          </a:ln>
+          <a:effectLst/>
+        </p:spPr>
+      </p:cxnSp>
+      <p:sp>
+        <p:nvSpPr>
+          <p:cNvPr id="23" name="C2-E24 text 21" descr="sci-ppt:o021"/>
+          <p:cNvSpPr txBox="1"/>
+          <p:nvPr/>
+        </p:nvSpPr>
+        <p:spPr>
+          <a:xfrm>
+            <a:off x="45720" y="4215384"/>
+            <a:ext cx="777240" cy="208407"/>
+          </a:xfrm>
+          <a:prstGeom prst="rect">
+            <a:avLst/>
+          </a:prstGeom>
+          <a:noFill/>
+          <a:effectLst/>
+        </p:spPr>
+        <p:txBody>
+          <a:bodyPr wrap="none" lIns="18288" rIns="18288" tIns="18288" bIns="18288" anchor="t">
+            <a:spAutoFit/>
+          </a:bodyPr>
+          <a:lstStyle/>
+          <a:p>
+            <a:pPr algn="r">
+              <a:spcAft>
+                <a:spcPts val="0"/>
+              </a:spcAft>
+            </a:pPr>
+            <a:r>
+              <a:rPr sz="1050" b="0" i="0">
+                <a:solidFill>
+                  <a:srgbClr val="B4C7D2"/>
+                </a:solidFill>
+                <a:latin typeface="Arial"/>
+              </a:rPr>
+              <a:t>1e+04</a:t>
+            </a:r>
+          </a:p>
+        </p:txBody>
+      </p:sp>
+      <p:cxnSp>
+        <p:nvCxnSpPr>
+          <p:cNvPr id="24" name="C2-E24 line 22" descr="sci-ppt:o022"/>
+          <p:cNvCxnSpPr/>
+          <p:nvPr/>
+        </p:nvCxnSpPr>
+        <p:spPr>
+          <a:xfrm>
+            <a:off x="850392" y="3566160"/>
+            <a:ext cx="64008" cy="0"/>
+          </a:xfrm>
+          <a:prstGeom prst="line">
+            <a:avLst/>
+          </a:prstGeom>
+          <a:ln w="12700">
+            <a:solidFill>
+              <a:srgbClr val="B4C7D2"/>
+            </a:solidFill>
+          </a:ln>
+          <a:effectLst/>
+        </p:spPr>
+      </p:cxnSp>
+      <p:cxnSp>
+        <p:nvCxnSpPr>
+          <p:cNvPr id="25" name="C2-E24 line 23" descr="sci-ppt:o023"/>
+          <p:cNvCxnSpPr/>
+          <p:nvPr/>
+        </p:nvCxnSpPr>
+        <p:spPr>
+          <a:xfrm>
+            <a:off x="914400" y="3566160"/>
+            <a:ext cx="6035040" cy="0"/>
+          </a:xfrm>
+          <a:prstGeom prst="line">
+            <a:avLst/>
+          </a:prstGeom>
+          <a:ln w="7620">
+            <a:solidFill>
+              <a:srgbClr val="2E4756"/>
+            </a:solidFill>
+          </a:ln>
+          <a:effectLst/>
+        </p:spPr>
+      </p:cxnSp>
+      <p:sp>
+        <p:nvSpPr>
+          <p:cNvPr id="26" name="C2-E24 text 24" descr="sci-ppt:o024"/>
+          <p:cNvSpPr txBox="1"/>
+          <p:nvPr/>
+        </p:nvSpPr>
+        <p:spPr>
+          <a:xfrm>
+            <a:off x="45720" y="3483864"/>
+            <a:ext cx="777240" cy="208407"/>
+          </a:xfrm>
+          <a:prstGeom prst="rect">
+            <a:avLst/>
+          </a:prstGeom>
+          <a:noFill/>
+          <a:effectLst/>
+        </p:spPr>
+        <p:txBody>
+          <a:bodyPr wrap="none" lIns="18288" rIns="18288" tIns="18288" bIns="18288" anchor="t">
+            <a:spAutoFit/>
+          </a:bodyPr>
+          <a:lstStyle/>
+          <a:p>
+            <a:pPr algn="r">
+              <a:spcAft>
+                <a:spcPts val="0"/>
+              </a:spcAft>
+            </a:pPr>
+            <a:r>
+              <a:rPr sz="1050" b="0" i="0">
+                <a:solidFill>
+                  <a:srgbClr val="B4C7D2"/>
+                </a:solidFill>
+                <a:latin typeface="Arial"/>
+              </a:rPr>
+              <a:t>1e+05</a:t>
+            </a:r>
+          </a:p>
+        </p:txBody>
+      </p:sp>
+      <p:cxnSp>
+        <p:nvCxnSpPr>
+          <p:cNvPr id="27" name="C2-E24 line 25" descr="sci-ppt:o025"/>
+          <p:cNvCxnSpPr/>
+          <p:nvPr/>
+        </p:nvCxnSpPr>
+        <p:spPr>
+          <a:xfrm>
+            <a:off x="850392" y="2834640"/>
+            <a:ext cx="64008" cy="0"/>
+          </a:xfrm>
+          <a:prstGeom prst="line">
+            <a:avLst/>
+          </a:prstGeom>
+          <a:ln w="12700">
+            <a:solidFill>
+              <a:srgbClr val="B4C7D2"/>
+            </a:solidFill>
+          </a:ln>
+          <a:effectLst/>
+        </p:spPr>
+      </p:cxnSp>
+      <p:cxnSp>
+        <p:nvCxnSpPr>
+          <p:cNvPr id="28" name="C2-E24 line 26" descr="sci-ppt:o026"/>
+          <p:cNvCxnSpPr/>
+          <p:nvPr/>
+        </p:nvCxnSpPr>
+        <p:spPr>
+          <a:xfrm>
+            <a:off x="914400" y="2834640"/>
+            <a:ext cx="6035040" cy="0"/>
+          </a:xfrm>
+          <a:prstGeom prst="line">
+            <a:avLst/>
+          </a:prstGeom>
+          <a:ln w="7620">
+            <a:solidFill>
+              <a:srgbClr val="2E4756"/>
+            </a:solidFill>
+          </a:ln>
+          <a:effectLst/>
+        </p:spPr>
+      </p:cxnSp>
+      <p:sp>
+        <p:nvSpPr>
+          <p:cNvPr id="29" name="C2-E24 text 27" descr="sci-ppt:o027"/>
+          <p:cNvSpPr txBox="1"/>
+          <p:nvPr/>
+        </p:nvSpPr>
+        <p:spPr>
+          <a:xfrm>
+            <a:off x="45720" y="2752344"/>
+            <a:ext cx="777240" cy="208407"/>
+          </a:xfrm>
+          <a:prstGeom prst="rect">
+            <a:avLst/>
+          </a:prstGeom>
+          <a:noFill/>
+          <a:effectLst/>
+        </p:spPr>
+        <p:txBody>
+          <a:bodyPr wrap="none" lIns="18288" rIns="18288" tIns="18288" bIns="18288" anchor="t">
+            <a:spAutoFit/>
+          </a:bodyPr>
+          <a:lstStyle/>
+          <a:p>
+            <a:pPr algn="r">
+              <a:spcAft>
+                <a:spcPts val="0"/>
+              </a:spcAft>
+            </a:pPr>
+            <a:r>
+              <a:rPr sz="1050" b="0" i="0">
+                <a:solidFill>
+                  <a:srgbClr val="B4C7D2"/>
+                </a:solidFill>
+                <a:latin typeface="Arial"/>
+              </a:rPr>
+              <a:t>1e+06</a:t>
+            </a:r>
+          </a:p>
+        </p:txBody>
+      </p:sp>
+      <p:cxnSp>
+        <p:nvCxnSpPr>
+          <p:cNvPr id="30" name="C2-E24 line 28" descr="sci-ppt:o028"/>
+          <p:cNvCxnSpPr/>
+          <p:nvPr/>
+        </p:nvCxnSpPr>
+        <p:spPr>
+          <a:xfrm>
+            <a:off x="850392" y="2103120"/>
+            <a:ext cx="64008" cy="0"/>
+          </a:xfrm>
+          <a:prstGeom prst="line">
+            <a:avLst/>
+          </a:prstGeom>
+          <a:ln w="12700">
+            <a:solidFill>
+              <a:srgbClr val="B4C7D2"/>
+            </a:solidFill>
+          </a:ln>
+          <a:effectLst/>
+        </p:spPr>
+      </p:cxnSp>
+      <p:cxnSp>
+        <p:nvCxnSpPr>
+          <p:cNvPr id="31" name="C2-E24 line 29" descr="sci-ppt:o029"/>
+          <p:cNvCxnSpPr/>
+          <p:nvPr/>
+        </p:nvCxnSpPr>
+        <p:spPr>
+          <a:xfrm>
+            <a:off x="914400" y="2103120"/>
+            <a:ext cx="6035040" cy="0"/>
+          </a:xfrm>
+          <a:prstGeom prst="line">
+            <a:avLst/>
+          </a:prstGeom>
+          <a:ln w="7620">
+            <a:solidFill>
+              <a:srgbClr val="2E4756"/>
+            </a:solidFill>
+          </a:ln>
+          <a:effectLst/>
+        </p:spPr>
+      </p:cxnSp>
+      <p:sp>
+        <p:nvSpPr>
+          <p:cNvPr id="32" name="C2-E24 text 30" descr="sci-ppt:o030"/>
+          <p:cNvSpPr txBox="1"/>
+          <p:nvPr/>
+        </p:nvSpPr>
+        <p:spPr>
+          <a:xfrm>
+            <a:off x="45720" y="2020824"/>
+            <a:ext cx="777240" cy="208407"/>
+          </a:xfrm>
+          <a:prstGeom prst="rect">
+            <a:avLst/>
+          </a:prstGeom>
+          <a:noFill/>
+          <a:effectLst/>
+        </p:spPr>
+        <p:txBody>
+          <a:bodyPr wrap="none" lIns="18288" rIns="18288" tIns="18288" bIns="18288" anchor="t">
+            <a:spAutoFit/>
+          </a:bodyPr>
+          <a:lstStyle/>
+          <a:p>
+            <a:pPr algn="r">
+              <a:spcAft>
+                <a:spcPts val="0"/>
+              </a:spcAft>
+            </a:pPr>
+            <a:r>
+              <a:rPr sz="1050" b="0" i="0">
+                <a:solidFill>
+                  <a:srgbClr val="B4C7D2"/>
+                </a:solidFill>
+                <a:latin typeface="Arial"/>
+              </a:rPr>
+              <a:t>1e+07</a:t>
+            </a:r>
+          </a:p>
+        </p:txBody>
+      </p:sp>
+      <p:cxnSp>
+        <p:nvCxnSpPr>
+          <p:cNvPr id="33" name="C2-E24 line 31" descr="sci-ppt:o031"/>
+          <p:cNvCxnSpPr/>
+          <p:nvPr/>
+        </p:nvCxnSpPr>
+        <p:spPr>
+          <a:xfrm>
+            <a:off x="850392" y="1371600"/>
+            <a:ext cx="64008" cy="0"/>
+          </a:xfrm>
+          <a:prstGeom prst="line">
+            <a:avLst/>
+          </a:prstGeom>
+          <a:ln w="12700">
+            <a:solidFill>
+              <a:srgbClr val="B4C7D2"/>
+            </a:solidFill>
+          </a:ln>
+          <a:effectLst/>
+        </p:spPr>
+      </p:cxnSp>
+      <p:cxnSp>
+        <p:nvCxnSpPr>
+          <p:cNvPr id="34" name="C2-E24 line 32" descr="sci-ppt:o032"/>
+          <p:cNvCxnSpPr/>
+          <p:nvPr/>
+        </p:nvCxnSpPr>
+        <p:spPr>
+          <a:xfrm>
+            <a:off x="914400" y="1371600"/>
+            <a:ext cx="6035040" cy="0"/>
+          </a:xfrm>
+          <a:prstGeom prst="line">
+            <a:avLst/>
+          </a:prstGeom>
+          <a:ln w="7620">
+            <a:solidFill>
+              <a:srgbClr val="2E4756"/>
+            </a:solidFill>
+          </a:ln>
+          <a:effectLst/>
+        </p:spPr>
+      </p:cxnSp>
+      <p:sp>
+        <p:nvSpPr>
+          <p:cNvPr id="35" name="C2-E24 text 33" descr="sci-ppt:o033"/>
+          <p:cNvSpPr txBox="1"/>
+          <p:nvPr/>
+        </p:nvSpPr>
+        <p:spPr>
+          <a:xfrm>
+            <a:off x="45720" y="1289304"/>
+            <a:ext cx="777240" cy="208407"/>
+          </a:xfrm>
+          <a:prstGeom prst="rect">
+            <a:avLst/>
+          </a:prstGeom>
+          <a:noFill/>
+          <a:effectLst/>
+        </p:spPr>
+        <p:txBody>
+          <a:bodyPr wrap="none" lIns="18288" rIns="18288" tIns="18288" bIns="18288" anchor="t">
+            <a:spAutoFit/>
+          </a:bodyPr>
+          <a:lstStyle/>
+          <a:p>
+            <a:pPr algn="r">
+              <a:spcAft>
+                <a:spcPts val="0"/>
+              </a:spcAft>
+            </a:pPr>
+            <a:r>
+              <a:rPr sz="1050" b="0" i="0">
+                <a:solidFill>
+                  <a:srgbClr val="B4C7D2"/>
+                </a:solidFill>
+                <a:latin typeface="Arial"/>
+              </a:rPr>
+              <a:t>1e+08</a:t>
+            </a:r>
+          </a:p>
+        </p:txBody>
+      </p:sp>
+      <p:sp>
+        <p:nvSpPr>
+          <p:cNvPr id="36" name="C2-E24 text 34" descr="sci-ppt:o034"/>
+          <p:cNvSpPr txBox="1"/>
+          <p:nvPr/>
+        </p:nvSpPr>
+        <p:spPr>
+          <a:xfrm>
+            <a:off x="914400" y="5312664"/>
+            <a:ext cx="6035040" cy="231648"/>
+          </a:xfrm>
+          <a:prstGeom prst="rect">
+            <a:avLst/>
+          </a:prstGeom>
+          <a:noFill/>
+          <a:effectLst/>
+        </p:spPr>
+        <p:txBody>
+          <a:bodyPr wrap="none" lIns="18288" rIns="18288" tIns="18288" bIns="18288" anchor="t">
+            <a:spAutoFit/>
+          </a:bodyPr>
+          <a:lstStyle/>
+          <a:p>
+            <a:pPr algn="ctr">
+              <a:spcAft>
+                <a:spcPts val="0"/>
+              </a:spcAft>
+            </a:pPr>
+            <a:r>
+              <a:rPr sz="1200" b="0" i="0">
+                <a:solidFill>
+                  <a:srgbClr val="E7F0F3"/>
+                </a:solidFill>
+                <a:latin typeface="Arial"/>
+              </a:rPr>
+              <a:t>bubble radius R  (µm)</a:t>
+            </a:r>
+          </a:p>
+        </p:txBody>
+      </p:sp>
+      <p:sp>
+        <p:nvSpPr>
+          <p:cNvPr id="37" name="C2-E24 text 35" descr="sci-ppt:o035"/>
+          <p:cNvSpPr txBox="1"/>
+          <p:nvPr/>
+        </p:nvSpPr>
+        <p:spPr>
+          <a:xfrm>
+            <a:off x="365760" y="1024128"/>
+            <a:ext cx="6035040" cy="231648"/>
+          </a:xfrm>
+          <a:prstGeom prst="rect">
+            <a:avLst/>
+          </a:prstGeom>
+          <a:noFill/>
+          <a:effectLst/>
+        </p:spPr>
+        <p:txBody>
+          <a:bodyPr wrap="none" lIns="18288" rIns="18288" tIns="18288" bIns="18288" anchor="t">
             <a:spAutoFit/>
           </a:bodyPr>
           <a:lstStyle/>
@@ -3293,61 +4111,372 @@
               </a:spcAft>
             </a:pPr>
             <a:r>
-              <a:rPr sz="1728" b="0" i="0">
+              <a:rPr sz="1200" b="0" i="0">
                 <a:solidFill>
                   <a:srgbClr val="E7F0F3"/>
                 </a:solidFill>
                 <a:latin typeface="Arial"/>
               </a:rPr>
-              <a:t>Temperature T_b</a:t>
-            </a:r>
-          </a:p>
-        </p:txBody>
-      </p:sp>
-      <p:cxnSp>
-        <p:nvCxnSpPr>
-          <p:cNvPr id="8" name="arrow7" descr="sci-ppt:C2-E24-007"/>
-          <p:cNvCxnSpPr/>
+              <a:t>ideal pᵥ,PFC  (Pa)</a:t>
+            </a:r>
+          </a:p>
+        </p:txBody>
+      </p:sp>
+      <p:sp>
+        <p:nvSpPr>
+          <p:cNvPr id="38" name="C2-E24 polygon 36" descr="sci-ppt:o036"/>
+          <p:cNvSpPr/>
           <p:nvPr/>
-        </p:nvCxnSpPr>
-        <p:spPr>
-          <a:xfrm flipH="1">
-            <a:off x="5974080" y="2743200"/>
-            <a:ext cx="243840" cy="975360"/>
-          </a:xfrm>
-          <a:prstGeom prst="line">
-            <a:avLst/>
-          </a:prstGeom>
-          <a:ln w="25400">
+        </p:nvSpPr>
+        <p:spPr>
+          <a:xfrm>
+            <a:off x="914400" y="1969996"/>
+            <a:ext cx="5974080" cy="2615822"/>
+          </a:xfrm>
+          <a:custGeom>
+            <a:avLst/>
+            <a:gdLst/>
+            <a:ahLst/>
+            <a:cxnLst/>
+            <a:rect l="l" t="t" r="r" b="b"/>
+            <a:pathLst>
+              <a:path w="5974080" h="2615822">
+                <a:moveTo>
+                  <a:pt x="0" y="0"/>
+                </a:moveTo>
+                <a:lnTo>
+                  <a:pt x="60960" y="26692"/>
+                </a:lnTo>
+                <a:lnTo>
+                  <a:pt x="121920" y="53384"/>
+                </a:lnTo>
+                <a:lnTo>
+                  <a:pt x="182879" y="80076"/>
+                </a:lnTo>
+                <a:lnTo>
+                  <a:pt x="243839" y="106768"/>
+                </a:lnTo>
+                <a:lnTo>
+                  <a:pt x="304800" y="133460"/>
+                </a:lnTo>
+                <a:lnTo>
+                  <a:pt x="365760" y="160153"/>
+                </a:lnTo>
+                <a:lnTo>
+                  <a:pt x="426719" y="186845"/>
+                </a:lnTo>
+                <a:lnTo>
+                  <a:pt x="487679" y="213537"/>
+                </a:lnTo>
+                <a:lnTo>
+                  <a:pt x="548639" y="240229"/>
+                </a:lnTo>
+                <a:lnTo>
+                  <a:pt x="609600" y="266921"/>
+                </a:lnTo>
+                <a:lnTo>
+                  <a:pt x="670560" y="293613"/>
+                </a:lnTo>
+                <a:lnTo>
+                  <a:pt x="731519" y="320305"/>
+                </a:lnTo>
+                <a:lnTo>
+                  <a:pt x="792479" y="346997"/>
+                </a:lnTo>
+                <a:lnTo>
+                  <a:pt x="853440" y="373689"/>
+                </a:lnTo>
+                <a:lnTo>
+                  <a:pt x="914400" y="400381"/>
+                </a:lnTo>
+                <a:lnTo>
+                  <a:pt x="975359" y="427073"/>
+                </a:lnTo>
+                <a:lnTo>
+                  <a:pt x="1036319" y="453765"/>
+                </a:lnTo>
+                <a:lnTo>
+                  <a:pt x="1097279" y="480457"/>
+                </a:lnTo>
+                <a:lnTo>
+                  <a:pt x="1158240" y="507149"/>
+                </a:lnTo>
+                <a:lnTo>
+                  <a:pt x="1219200" y="533841"/>
+                </a:lnTo>
+                <a:lnTo>
+                  <a:pt x="1280159" y="560533"/>
+                </a:lnTo>
+                <a:lnTo>
+                  <a:pt x="1341119" y="587225"/>
+                </a:lnTo>
+                <a:lnTo>
+                  <a:pt x="1402080" y="613918"/>
+                </a:lnTo>
+                <a:lnTo>
+                  <a:pt x="1463040" y="640610"/>
+                </a:lnTo>
+                <a:lnTo>
+                  <a:pt x="1523999" y="667302"/>
+                </a:lnTo>
+                <a:lnTo>
+                  <a:pt x="1584959" y="693994"/>
+                </a:lnTo>
+                <a:lnTo>
+                  <a:pt x="1645920" y="720686"/>
+                </a:lnTo>
+                <a:lnTo>
+                  <a:pt x="1706880" y="747378"/>
+                </a:lnTo>
+                <a:lnTo>
+                  <a:pt x="1767840" y="774070"/>
+                </a:lnTo>
+                <a:lnTo>
+                  <a:pt x="1828799" y="800762"/>
+                </a:lnTo>
+                <a:lnTo>
+                  <a:pt x="1889760" y="827454"/>
+                </a:lnTo>
+                <a:lnTo>
+                  <a:pt x="1950720" y="854146"/>
+                </a:lnTo>
+                <a:lnTo>
+                  <a:pt x="2011680" y="880838"/>
+                </a:lnTo>
+                <a:lnTo>
+                  <a:pt x="2072639" y="907530"/>
+                </a:lnTo>
+                <a:lnTo>
+                  <a:pt x="2133599" y="934222"/>
+                </a:lnTo>
+                <a:lnTo>
+                  <a:pt x="2194560" y="960914"/>
+                </a:lnTo>
+                <a:lnTo>
+                  <a:pt x="2255520" y="987606"/>
+                </a:lnTo>
+                <a:lnTo>
+                  <a:pt x="2316480" y="1014298"/>
+                </a:lnTo>
+                <a:lnTo>
+                  <a:pt x="2377439" y="1040990"/>
+                </a:lnTo>
+                <a:lnTo>
+                  <a:pt x="2438400" y="1067682"/>
+                </a:lnTo>
+                <a:lnTo>
+                  <a:pt x="2499360" y="1094375"/>
+                </a:lnTo>
+                <a:lnTo>
+                  <a:pt x="2560320" y="1121067"/>
+                </a:lnTo>
+                <a:lnTo>
+                  <a:pt x="2621279" y="1147759"/>
+                </a:lnTo>
+                <a:lnTo>
+                  <a:pt x="2682239" y="1174451"/>
+                </a:lnTo>
+                <a:lnTo>
+                  <a:pt x="2743200" y="1201143"/>
+                </a:lnTo>
+                <a:lnTo>
+                  <a:pt x="2804160" y="1227835"/>
+                </a:lnTo>
+                <a:lnTo>
+                  <a:pt x="2865120" y="1254527"/>
+                </a:lnTo>
+                <a:lnTo>
+                  <a:pt x="2926079" y="1281219"/>
+                </a:lnTo>
+                <a:lnTo>
+                  <a:pt x="2987040" y="1307911"/>
+                </a:lnTo>
+                <a:lnTo>
+                  <a:pt x="3048000" y="1334603"/>
+                </a:lnTo>
+                <a:lnTo>
+                  <a:pt x="3108960" y="1361295"/>
+                </a:lnTo>
+                <a:lnTo>
+                  <a:pt x="3169919" y="1387987"/>
+                </a:lnTo>
+                <a:lnTo>
+                  <a:pt x="3230879" y="1414679"/>
+                </a:lnTo>
+                <a:lnTo>
+                  <a:pt x="3291840" y="1441371"/>
+                </a:lnTo>
+                <a:lnTo>
+                  <a:pt x="3352800" y="1468063"/>
+                </a:lnTo>
+                <a:lnTo>
+                  <a:pt x="3413760" y="1494755"/>
+                </a:lnTo>
+                <a:lnTo>
+                  <a:pt x="3474719" y="1521447"/>
+                </a:lnTo>
+                <a:lnTo>
+                  <a:pt x="3535680" y="1548139"/>
+                </a:lnTo>
+                <a:lnTo>
+                  <a:pt x="3596640" y="1574832"/>
+                </a:lnTo>
+                <a:lnTo>
+                  <a:pt x="3657600" y="1601524"/>
+                </a:lnTo>
+                <a:lnTo>
+                  <a:pt x="3718559" y="1628216"/>
+                </a:lnTo>
+                <a:lnTo>
+                  <a:pt x="3779520" y="1654908"/>
+                </a:lnTo>
+                <a:lnTo>
+                  <a:pt x="3840480" y="1681600"/>
+                </a:lnTo>
+                <a:lnTo>
+                  <a:pt x="3901440" y="1708292"/>
+                </a:lnTo>
+                <a:lnTo>
+                  <a:pt x="3962400" y="1734984"/>
+                </a:lnTo>
+                <a:lnTo>
+                  <a:pt x="4023359" y="1761676"/>
+                </a:lnTo>
+                <a:lnTo>
+                  <a:pt x="4084320" y="1788368"/>
+                </a:lnTo>
+                <a:lnTo>
+                  <a:pt x="4145280" y="1815060"/>
+                </a:lnTo>
+                <a:lnTo>
+                  <a:pt x="4206240" y="1841752"/>
+                </a:lnTo>
+                <a:lnTo>
+                  <a:pt x="4267199" y="1868444"/>
+                </a:lnTo>
+                <a:lnTo>
+                  <a:pt x="4328159" y="1895136"/>
+                </a:lnTo>
+                <a:lnTo>
+                  <a:pt x="4389120" y="1921828"/>
+                </a:lnTo>
+                <a:lnTo>
+                  <a:pt x="4450080" y="1948520"/>
+                </a:lnTo>
+                <a:lnTo>
+                  <a:pt x="4511040" y="1975212"/>
+                </a:lnTo>
+                <a:lnTo>
+                  <a:pt x="4572000" y="2001904"/>
+                </a:lnTo>
+                <a:lnTo>
+                  <a:pt x="4632960" y="2028596"/>
+                </a:lnTo>
+                <a:lnTo>
+                  <a:pt x="4693920" y="2055289"/>
+                </a:lnTo>
+                <a:lnTo>
+                  <a:pt x="4754880" y="2081981"/>
+                </a:lnTo>
+                <a:lnTo>
+                  <a:pt x="4815839" y="2108673"/>
+                </a:lnTo>
+                <a:lnTo>
+                  <a:pt x="4876800" y="2135365"/>
+                </a:lnTo>
+                <a:lnTo>
+                  <a:pt x="4937760" y="2162057"/>
+                </a:lnTo>
+                <a:lnTo>
+                  <a:pt x="4998720" y="2188749"/>
+                </a:lnTo>
+                <a:lnTo>
+                  <a:pt x="5059680" y="2215441"/>
+                </a:lnTo>
+                <a:lnTo>
+                  <a:pt x="5120640" y="2242133"/>
+                </a:lnTo>
+                <a:lnTo>
+                  <a:pt x="5181600" y="2268825"/>
+                </a:lnTo>
+                <a:lnTo>
+                  <a:pt x="5242560" y="2295517"/>
+                </a:lnTo>
+                <a:lnTo>
+                  <a:pt x="5303520" y="2322209"/>
+                </a:lnTo>
+                <a:lnTo>
+                  <a:pt x="5364480" y="2348901"/>
+                </a:lnTo>
+                <a:lnTo>
+                  <a:pt x="5425440" y="2375593"/>
+                </a:lnTo>
+                <a:lnTo>
+                  <a:pt x="5486400" y="2402285"/>
+                </a:lnTo>
+                <a:lnTo>
+                  <a:pt x="5547360" y="2428977"/>
+                </a:lnTo>
+                <a:lnTo>
+                  <a:pt x="5608320" y="2455669"/>
+                </a:lnTo>
+                <a:lnTo>
+                  <a:pt x="5669280" y="2482361"/>
+                </a:lnTo>
+                <a:lnTo>
+                  <a:pt x="5730240" y="2509053"/>
+                </a:lnTo>
+                <a:lnTo>
+                  <a:pt x="5791200" y="2535746"/>
+                </a:lnTo>
+                <a:lnTo>
+                  <a:pt x="5852159" y="2562438"/>
+                </a:lnTo>
+                <a:lnTo>
+                  <a:pt x="5913119" y="2589130"/>
+                </a:lnTo>
+                <a:lnTo>
+                  <a:pt x="5974080" y="2615822"/>
+                </a:lnTo>
+              </a:path>
+            </a:pathLst>
+          </a:custGeom>
+          <a:noFill/>
+          <a:ln w="38100">
             <a:solidFill>
               <a:srgbClr val="8EDBD4"/>
             </a:solidFill>
-            <a:headEnd type="none" w="med" len="med"/>
-            <a:tailEnd type="triangle" w="med" len="med"/>
           </a:ln>
           <a:effectLst/>
         </p:spPr>
-      </p:cxnSp>
-      <p:sp>
-        <p:nvSpPr>
-          <p:cNvPr id="9" name="rect8" descr="sci-ppt:C2-E24-008"/>
+        <p:txBody>
+          <a:bodyPr rtlCol="0" anchor="ctr"/>
+          <a:lstStyle/>
+          <a:p>
+            <a:pPr algn="ctr"/>
+          </a:p>
+        </p:txBody>
+      </p:sp>
+      <p:sp>
+        <p:nvSpPr>
+          <p:cNvPr id="39" name="C2-E24 ellipse 37" descr="sci-ppt:o037"/>
           <p:cNvSpPr/>
           <p:nvPr/>
         </p:nvSpPr>
         <p:spPr>
           <a:xfrm>
-            <a:off x="8290560" y="1463040"/>
-            <a:ext cx="3413760" cy="1158240"/>
-          </a:xfrm>
-          <a:prstGeom prst="rect">
+            <a:off x="4486268" y="3493008"/>
+            <a:ext cx="146304" cy="146304"/>
+          </a:xfrm>
+          <a:prstGeom prst="ellipse">
             <a:avLst/>
           </a:prstGeom>
           <a:solidFill>
-            <a:srgbClr val="213E4B"/>
+            <a:srgbClr val="F2B880"/>
           </a:solidFill>
-          <a:ln w="19050">
+          <a:ln w="12700">
             <a:solidFill>
-              <a:srgbClr val="B4C7D2"/>
+              <a:srgbClr val="F2B880"/>
             </a:solidFill>
           </a:ln>
           <a:effectLst/>
@@ -3362,14 +4491,14 @@
       </p:sp>
       <p:sp>
         <p:nvSpPr>
-          <p:cNvPr id="10" name="text9" descr="sci-ppt:C2-E24-009"/>
+          <p:cNvPr id="40" name="C2-E24 text 38" descr="sci-ppt:o038"/>
           <p:cNvSpPr txBox="1"/>
           <p:nvPr/>
         </p:nvSpPr>
         <p:spPr>
           <a:xfrm>
-            <a:off x="8412480" y="1584960"/>
-            <a:ext cx="3230880" cy="340156"/>
+            <a:off x="4650860" y="3108960"/>
+            <a:ext cx="2194560" cy="231648"/>
           </a:xfrm>
           <a:prstGeom prst="rect">
             <a:avLst/>
@@ -3378,7 +4507,7 @@
           <a:effectLst/>
         </p:spPr>
         <p:txBody>
-          <a:bodyPr wrap="none" lIns="27432" rIns="27432" tIns="18288" bIns="18288" anchor="ctr">
+          <a:bodyPr wrap="none" lIns="18288" rIns="18288" tIns="18288" bIns="18288" anchor="t">
             <a:spAutoFit/>
           </a:bodyPr>
           <a:lstStyle/>
@@ -3389,95 +4518,167 @@
               </a:spcAft>
             </a:pPr>
             <a:r>
-              <a:rPr sz="1728" b="0" i="0">
+              <a:rPr sz="1200" b="0" i="0">
+                <a:solidFill>
+                  <a:srgbClr val="F2B880"/>
+                </a:solidFill>
+                <a:latin typeface="Arial"/>
+              </a:rPr>
+              <a:t>R = 26.7 µm: p = 1 bar</a:t>
+            </a:r>
+          </a:p>
+        </p:txBody>
+      </p:sp>
+      <p:sp>
+        <p:nvSpPr>
+          <p:cNvPr id="41" name="C2-E24 text 39" descr="sci-ppt:o039"/>
+          <p:cNvSpPr txBox="1"/>
+          <p:nvPr/>
+        </p:nvSpPr>
+        <p:spPr>
+          <a:xfrm>
+            <a:off x="2703771" y="1837190"/>
+            <a:ext cx="2743200" cy="239395"/>
+          </a:xfrm>
+          <a:prstGeom prst="rect">
+            <a:avLst/>
+          </a:prstGeom>
+          <a:noFill/>
+          <a:effectLst/>
+        </p:spPr>
+        <p:txBody>
+          <a:bodyPr wrap="none" lIns="18288" rIns="18288" tIns="18288" bIns="18288" anchor="t">
+            <a:spAutoFit/>
+          </a:bodyPr>
+          <a:lstStyle/>
+          <a:p>
+            <a:pPr algn="l">
+              <a:spcAft>
+                <a:spcPts val="0"/>
+              </a:spcAft>
+            </a:pPr>
+            <a:r>
+              <a:rPr sz="1250" b="0" i="0">
+                <a:solidFill>
+                  <a:srgbClr val="8EDBD4"/>
+                </a:solidFill>
+                <a:latin typeface="Arial"/>
+              </a:rPr>
+              <a:t>p ∝ m T / R³ for fixed m, T</a:t>
+            </a:r>
+          </a:p>
+        </p:txBody>
+      </p:sp>
+      <p:sp>
+        <p:nvSpPr>
+          <p:cNvPr id="42" name="C2-E24 round_rect 40" descr="sci-ppt:o040"/>
+          <p:cNvSpPr/>
+          <p:nvPr/>
+        </p:nvSpPr>
+        <p:spPr>
+          <a:xfrm>
+            <a:off x="7589520" y="1371600"/>
+            <a:ext cx="4251960" cy="3657600"/>
+          </a:xfrm>
+          <a:prstGeom prst="roundRect">
+            <a:avLst/>
+          </a:prstGeom>
+          <a:solidFill>
+            <a:srgbClr val="213E4B"/>
+          </a:solidFill>
+          <a:ln w="20320">
+            <a:solidFill>
+              <a:srgbClr val="8EDBD4"/>
+            </a:solidFill>
+          </a:ln>
+          <a:effectLst/>
+        </p:spPr>
+        <p:txBody>
+          <a:bodyPr rtlCol="0" anchor="ctr"/>
+          <a:lstStyle/>
+          <a:p>
+            <a:pPr algn="ctr"/>
+          </a:p>
+        </p:txBody>
+      </p:sp>
+      <p:sp>
+        <p:nvSpPr>
+          <p:cNvPr id="43" name="C2-E24 text 41" descr="sci-ppt:o041"/>
+          <p:cNvSpPr txBox="1"/>
+          <p:nvPr/>
+        </p:nvSpPr>
+        <p:spPr>
+          <a:xfrm>
+            <a:off x="7699248" y="1426464"/>
+            <a:ext cx="4032504" cy="254889"/>
+          </a:xfrm>
+          <a:prstGeom prst="rect">
+            <a:avLst/>
+          </a:prstGeom>
+          <a:noFill/>
+          <a:effectLst/>
+        </p:spPr>
+        <p:txBody>
+          <a:bodyPr wrap="none" lIns="18288" rIns="18288" tIns="18288" bIns="18288" anchor="t">
+            <a:spAutoFit/>
+          </a:bodyPr>
+          <a:lstStyle/>
+          <a:p>
+            <a:pPr algn="l">
+              <a:spcAft>
+                <a:spcPts val="0"/>
+              </a:spcAft>
+            </a:pPr>
+            <a:r>
+              <a:rPr sz="1350" b="1" i="0">
+                <a:solidFill>
+                  <a:srgbClr val="8EDBD4"/>
+                </a:solidFill>
+                <a:latin typeface="Arial"/>
+              </a:rPr>
+              <a:t>Pressure responds to three things</a:t>
+            </a:r>
+          </a:p>
+        </p:txBody>
+      </p:sp>
+      <p:sp>
+        <p:nvSpPr>
+          <p:cNvPr id="44" name="C2-E24 text 42" descr="sci-ppt:o042"/>
+          <p:cNvSpPr txBox="1"/>
+          <p:nvPr/>
+        </p:nvSpPr>
+        <p:spPr>
+          <a:xfrm>
+            <a:off x="7726679" y="1828800"/>
+            <a:ext cx="4023360" cy="433070"/>
+          </a:xfrm>
+          <a:prstGeom prst="rect">
+            <a:avLst/>
+          </a:prstGeom>
+          <a:noFill/>
+          <a:effectLst/>
+        </p:spPr>
+        <p:txBody>
+          <a:bodyPr wrap="none" lIns="18288" rIns="18288" tIns="18288" bIns="18288" anchor="t">
+            <a:spAutoFit/>
+          </a:bodyPr>
+          <a:lstStyle/>
+          <a:p>
+            <a:pPr algn="l">
+              <a:spcAft>
+                <a:spcPts val="0"/>
+              </a:spcAft>
+            </a:pPr>
+            <a:r>
+              <a:rPr sz="1250" b="1" i="0">
                 <a:solidFill>
                   <a:srgbClr val="E7F0F3"/>
                 </a:solidFill>
                 <a:latin typeface="Arial"/>
               </a:rPr>
-              <a:t>Bubble volume V_b</a:t>
-            </a:r>
-          </a:p>
-        </p:txBody>
-      </p:sp>
-      <p:cxnSp>
-        <p:nvCxnSpPr>
-          <p:cNvPr id="11" name="arrow10" descr="sci-ppt:C2-E24-010"/>
-          <p:cNvCxnSpPr/>
-          <p:nvPr/>
-        </p:nvCxnSpPr>
-        <p:spPr>
-          <a:xfrm flipH="1">
-            <a:off x="5974080" y="2743200"/>
-            <a:ext cx="4023360" cy="975360"/>
-          </a:xfrm>
-          <a:prstGeom prst="line">
-            <a:avLst/>
-          </a:prstGeom>
-          <a:ln w="25400">
-            <a:solidFill>
-              <a:srgbClr val="8EDBD4"/>
-            </a:solidFill>
-            <a:headEnd type="none" w="med" len="med"/>
-            <a:tailEnd type="triangle" w="med" len="med"/>
-          </a:ln>
-          <a:effectLst/>
-        </p:spPr>
-      </p:cxnSp>
-      <p:sp>
-        <p:nvSpPr>
-          <p:cNvPr id="12" name="rect11" descr="sci-ppt:C2-E24-011"/>
-          <p:cNvSpPr/>
-          <p:nvPr/>
-        </p:nvSpPr>
-        <p:spPr>
-          <a:xfrm>
-            <a:off x="3779520" y="3596640"/>
-            <a:ext cx="4389120" cy="792480"/>
-          </a:xfrm>
-          <a:prstGeom prst="rect">
-            <a:avLst/>
-          </a:prstGeom>
-          <a:solidFill>
-            <a:srgbClr val="213E4B"/>
-          </a:solidFill>
-          <a:ln w="19050">
-            <a:solidFill>
-              <a:srgbClr val="B4C7D2"/>
-            </a:solidFill>
-          </a:ln>
-          <a:effectLst/>
-        </p:spPr>
-        <p:txBody>
-          <a:bodyPr rtlCol="0" anchor="ctr"/>
-          <a:lstStyle/>
-          <a:p>
-            <a:pPr algn="ctr"/>
-          </a:p>
-        </p:txBody>
-      </p:sp>
-      <p:sp>
-        <p:nvSpPr>
-          <p:cNvPr id="13" name="text12" descr="sci-ppt:C2-E24-012"/>
-          <p:cNvSpPr txBox="1"/>
-          <p:nvPr/>
-        </p:nvSpPr>
-        <p:spPr>
-          <a:xfrm>
-            <a:off x="3901440" y="3718560"/>
-            <a:ext cx="4206240" cy="340156"/>
-          </a:xfrm>
-          <a:prstGeom prst="rect">
-            <a:avLst/>
-          </a:prstGeom>
-          <a:noFill/>
-          <a:effectLst/>
-        </p:spPr>
-        <p:txBody>
-          <a:bodyPr wrap="none" lIns="27432" rIns="27432" tIns="18288" bIns="18288" anchor="ctr">
-            <a:spAutoFit/>
-          </a:bodyPr>
-          <a:lstStyle/>
+              <a:t>pᵥ,s V_b = (mᵥ,s / Mₛ) Rᵤ T_b</a:t>
+            </a:r>
+          </a:p>
           <a:p>
             <a:pPr algn="l">
               <a:spcAft>
@@ -3485,27 +4686,27 @@
               </a:spcAft>
             </a:pPr>
             <a:r>
-              <a:rPr sz="1728" b="0" i="0">
+              <a:rPr sz="1250" b="1" i="0">
                 <a:solidFill>
                   <a:srgbClr val="E7F0F3"/>
                 </a:solidFill>
                 <a:latin typeface="Arial"/>
               </a:rPr>
-              <a:t>Mixture pressure p_b</a:t>
-            </a:r>
-          </a:p>
-        </p:txBody>
-      </p:sp>
-      <p:sp>
-        <p:nvSpPr>
-          <p:cNvPr id="14" name="text13" descr="sci-ppt:C2-E24-013"/>
+              <a:t>p_b = Σ pᵥ,s</a:t>
+            </a:r>
+          </a:p>
+        </p:txBody>
+      </p:sp>
+      <p:sp>
+        <p:nvSpPr>
+          <p:cNvPr id="45" name="C2-E24 text 43" descr="sci-ppt:o043"/>
           <p:cNvSpPr txBox="1"/>
           <p:nvPr/>
         </p:nvSpPr>
         <p:spPr>
           <a:xfrm>
-            <a:off x="365760" y="4974336"/>
-            <a:ext cx="5547360" cy="321259"/>
+            <a:off x="7927848" y="2606040"/>
+            <a:ext cx="3822192" cy="239395"/>
           </a:xfrm>
           <a:prstGeom prst="rect">
             <a:avLst/>
@@ -3514,7 +4715,7 @@
           <a:effectLst/>
         </p:spPr>
         <p:txBody>
-          <a:bodyPr wrap="none" lIns="27432" rIns="27432" tIns="18288" bIns="18288" anchor="ctr">
+          <a:bodyPr wrap="none" lIns="18288" rIns="18288" tIns="18288" bIns="18288" anchor="t">
             <a:spAutoFit/>
           </a:bodyPr>
           <a:lstStyle/>
@@ -3525,27 +4726,59 @@
               </a:spcAft>
             </a:pPr>
             <a:r>
-              <a:rPr sz="1632" b="0" i="0">
+              <a:rPr sz="1250" b="0" i="0">
                 <a:solidFill>
                   <a:srgbClr val="E7F0F3"/>
                 </a:solidFill>
                 <a:latin typeface="Arial"/>
               </a:rPr>
-              <a:t>m_v,s, M_s: species mole inventory</a:t>
-            </a:r>
-          </a:p>
-        </p:txBody>
-      </p:sp>
-      <p:sp>
-        <p:nvSpPr>
-          <p:cNvPr id="15" name="text14" descr="sci-ppt:C2-E24-014"/>
+              <a:t>species mass mᵥ,s (evaporation raises p)</a:t>
+            </a:r>
+          </a:p>
+        </p:txBody>
+      </p:sp>
+      <p:sp>
+        <p:nvSpPr>
+          <p:cNvPr id="46" name="C2-E24 ellipse 44" descr="sci-ppt:o044"/>
+          <p:cNvSpPr/>
+          <p:nvPr/>
+        </p:nvSpPr>
+        <p:spPr>
+          <a:xfrm>
+            <a:off x="7758683" y="2663317"/>
+            <a:ext cx="82296" cy="82296"/>
+          </a:xfrm>
+          <a:prstGeom prst="ellipse">
+            <a:avLst/>
+          </a:prstGeom>
+          <a:solidFill>
+            <a:srgbClr val="8EDBD4"/>
+          </a:solidFill>
+          <a:ln w="12700">
+            <a:solidFill>
+              <a:srgbClr val="8EDBD4"/>
+            </a:solidFill>
+          </a:ln>
+          <a:effectLst/>
+        </p:spPr>
+        <p:txBody>
+          <a:bodyPr rtlCol="0" anchor="ctr"/>
+          <a:lstStyle/>
+          <a:p>
+            <a:pPr algn="ctr"/>
+          </a:p>
+        </p:txBody>
+      </p:sp>
+      <p:sp>
+        <p:nvSpPr>
+          <p:cNvPr id="47" name="C2-E24 text 45" descr="sci-ppt:o045"/>
           <p:cNvSpPr txBox="1"/>
           <p:nvPr/>
         </p:nvSpPr>
         <p:spPr>
           <a:xfrm>
-            <a:off x="365760" y="5266944"/>
-            <a:ext cx="5547360" cy="321259"/>
+            <a:off x="7927848" y="2891155"/>
+            <a:ext cx="3822192" cy="239395"/>
           </a:xfrm>
           <a:prstGeom prst="rect">
             <a:avLst/>
@@ -3554,7 +4787,7 @@
           <a:effectLst/>
         </p:spPr>
         <p:txBody>
-          <a:bodyPr wrap="none" lIns="27432" rIns="27432" tIns="18288" bIns="18288" anchor="ctr">
+          <a:bodyPr wrap="none" lIns="18288" rIns="18288" tIns="18288" bIns="18288" anchor="t">
             <a:spAutoFit/>
           </a:bodyPr>
           <a:lstStyle/>
@@ -3565,27 +4798,59 @@
               </a:spcAft>
             </a:pPr>
             <a:r>
-              <a:rPr sz="1632" b="0" i="0">
+              <a:rPr sz="1250" b="0" i="0">
                 <a:solidFill>
                   <a:srgbClr val="E7F0F3"/>
                 </a:solidFill>
                 <a:latin typeface="Arial"/>
               </a:rPr>
-              <a:t>V_b: finite bubble volume</a:t>
-            </a:r>
-          </a:p>
-        </p:txBody>
-      </p:sp>
-      <p:sp>
-        <p:nvSpPr>
-          <p:cNvPr id="16" name="text15" descr="sci-ppt:C2-E24-015"/>
+              <a:t>temperature T_b (heating raises p)</a:t>
+            </a:r>
+          </a:p>
+        </p:txBody>
+      </p:sp>
+      <p:sp>
+        <p:nvSpPr>
+          <p:cNvPr id="48" name="C2-E24 ellipse 46" descr="sci-ppt:o046"/>
+          <p:cNvSpPr/>
+          <p:nvPr/>
+        </p:nvSpPr>
+        <p:spPr>
+          <a:xfrm>
+            <a:off x="7758683" y="2948432"/>
+            <a:ext cx="82296" cy="82296"/>
+          </a:xfrm>
+          <a:prstGeom prst="ellipse">
+            <a:avLst/>
+          </a:prstGeom>
+          <a:solidFill>
+            <a:srgbClr val="8EDBD4"/>
+          </a:solidFill>
+          <a:ln w="12700">
+            <a:solidFill>
+              <a:srgbClr val="8EDBD4"/>
+            </a:solidFill>
+          </a:ln>
+          <a:effectLst/>
+        </p:spPr>
+        <p:txBody>
+          <a:bodyPr rtlCol="0" anchor="ctr"/>
+          <a:lstStyle/>
+          <a:p>
+            <a:pPr algn="ctr"/>
+          </a:p>
+        </p:txBody>
+      </p:sp>
+      <p:sp>
+        <p:nvSpPr>
+          <p:cNvPr id="49" name="C2-E24 text 47" descr="sci-ppt:o047"/>
           <p:cNvSpPr txBox="1"/>
           <p:nvPr/>
         </p:nvSpPr>
         <p:spPr>
           <a:xfrm>
-            <a:off x="365760" y="5559552"/>
-            <a:ext cx="5547360" cy="321259"/>
+            <a:off x="7927848" y="3176270"/>
+            <a:ext cx="3822192" cy="239395"/>
           </a:xfrm>
           <a:prstGeom prst="rect">
             <a:avLst/>
@@ -3594,7 +4859,7 @@
           <a:effectLst/>
         </p:spPr>
         <p:txBody>
-          <a:bodyPr wrap="none" lIns="27432" rIns="27432" tIns="18288" bIns="18288" anchor="ctr">
+          <a:bodyPr wrap="none" lIns="18288" rIns="18288" tIns="18288" bIns="18288" anchor="t">
             <a:spAutoFit/>
           </a:bodyPr>
           <a:lstStyle/>
@@ -3605,27 +4870,59 @@
               </a:spcAft>
             </a:pPr>
             <a:r>
-              <a:rPr sz="1632" b="0" i="0">
+              <a:rPr sz="1250" b="0" i="0">
                 <a:solidFill>
                   <a:srgbClr val="E7F0F3"/>
                 </a:solidFill>
                 <a:latin typeface="Arial"/>
               </a:rPr>
-              <a:t>p_b: total mixture pressure</a:t>
-            </a:r>
-          </a:p>
-        </p:txBody>
-      </p:sp>
-      <p:sp>
-        <p:nvSpPr>
-          <p:cNvPr id="17" name="text16" descr="sci-ppt:C2-E24-016"/>
+              <a:t>volume V_b (expansion lowers p)</a:t>
+            </a:r>
+          </a:p>
+        </p:txBody>
+      </p:sp>
+      <p:sp>
+        <p:nvSpPr>
+          <p:cNvPr id="50" name="C2-E24 ellipse 48" descr="sci-ppt:o048"/>
+          <p:cNvSpPr/>
+          <p:nvPr/>
+        </p:nvSpPr>
+        <p:spPr>
+          <a:xfrm>
+            <a:off x="7758683" y="3233547"/>
+            <a:ext cx="82296" cy="82296"/>
+          </a:xfrm>
+          <a:prstGeom prst="ellipse">
+            <a:avLst/>
+          </a:prstGeom>
+          <a:solidFill>
+            <a:srgbClr val="8EDBD4"/>
+          </a:solidFill>
+          <a:ln w="12700">
+            <a:solidFill>
+              <a:srgbClr val="8EDBD4"/>
+            </a:solidFill>
+          </a:ln>
+          <a:effectLst/>
+        </p:spPr>
+        <p:txBody>
+          <a:bodyPr rtlCol="0" anchor="ctr"/>
+          <a:lstStyle/>
+          <a:p>
+            <a:pPr algn="ctr"/>
+          </a:p>
+        </p:txBody>
+      </p:sp>
+      <p:sp>
+        <p:nvSpPr>
+          <p:cNvPr id="51" name="C2-E24 text 49" descr="sci-ppt:o049"/>
           <p:cNvSpPr txBox="1"/>
           <p:nvPr/>
         </p:nvSpPr>
         <p:spPr>
           <a:xfrm>
-            <a:off x="365760" y="5852160"/>
-            <a:ext cx="5547360" cy="321259"/>
+            <a:off x="7726679" y="3977639"/>
+            <a:ext cx="4023360" cy="603504"/>
           </a:xfrm>
           <a:prstGeom prst="rect">
             <a:avLst/>
@@ -3634,7 +4931,7 @@
           <a:effectLst/>
         </p:spPr>
         <p:txBody>
-          <a:bodyPr wrap="none" lIns="27432" rIns="27432" tIns="18288" bIns="18288" anchor="ctr">
+          <a:bodyPr wrap="none" lIns="18288" rIns="18288" tIns="18288" bIns="18288" anchor="t">
             <a:spAutoFit/>
           </a:bodyPr>
           <a:lstStyle/>
@@ -3645,39 +4942,87 @@
               </a:spcAft>
             </a:pPr>
             <a:r>
-              <a:rPr sz="1632" b="0" i="0">
+              <a:rPr sz="1200" b="0" i="0">
+                <a:solidFill>
+                  <a:srgbClr val="B4C7D2"/>
+                </a:solidFill>
+                <a:latin typeface="Arial"/>
+              </a:rPr>
+              <a:t>This ideal-mixture control is a first model; a</a:t>
+            </a:r>
+          </a:p>
+          <a:p>
+            <a:pPr algn="l">
+              <a:spcAft>
+                <a:spcPts val="0"/>
+              </a:spcAft>
+            </a:pPr>
+            <a:r>
+              <a:rPr sz="1200" b="0" i="0">
+                <a:solidFill>
+                  <a:srgbClr val="B4C7D2"/>
+                </a:solidFill>
+                <a:latin typeface="Arial"/>
+              </a:rPr>
+              <a:t>real-mixture equation of state p = 𝒫(ρ_b, e_b, Y)</a:t>
+            </a:r>
+          </a:p>
+          <a:p>
+            <a:pPr algn="l">
+              <a:spcAft>
+                <a:spcPts val="0"/>
+              </a:spcAft>
+            </a:pPr>
+            <a:r>
+              <a:rPr sz="1200" b="0" i="0">
+                <a:solidFill>
+                  <a:srgbClr val="B4C7D2"/>
+                </a:solidFill>
+                <a:latin typeface="Arial"/>
+              </a:rPr>
+              <a:t>is the required refinement.</a:t>
+            </a:r>
+          </a:p>
+        </p:txBody>
+      </p:sp>
+      <p:sp>
+        <p:nvSpPr>
+          <p:cNvPr id="52" name="C2-E24 text 50" descr="sci-ppt:o050"/>
+          <p:cNvSpPr txBox="1"/>
+          <p:nvPr/>
+        </p:nvSpPr>
+        <p:spPr>
+          <a:xfrm>
+            <a:off x="914400" y="5733288"/>
+            <a:ext cx="10972800" cy="433070"/>
+          </a:xfrm>
+          <a:prstGeom prst="rect">
+            <a:avLst/>
+          </a:prstGeom>
+          <a:noFill/>
+          <a:effectLst/>
+        </p:spPr>
+        <p:txBody>
+          <a:bodyPr wrap="none" lIns="18288" rIns="18288" tIns="18288" bIns="18288" anchor="t">
+            <a:spAutoFit/>
+          </a:bodyPr>
+          <a:lstStyle/>
+          <a:p>
+            <a:pPr algn="l">
+              <a:spcAft>
+                <a:spcPts val="0"/>
+              </a:spcAft>
+            </a:pPr>
+            <a:r>
+              <a:rPr sz="1250" b="0" i="0">
                 <a:solidFill>
                   <a:srgbClr val="E7F0F3"/>
                 </a:solidFill>
                 <a:latin typeface="Arial"/>
               </a:rPr>
-              <a:t>ρ_b, e_b, Y: real-mixture state</a:t>
-            </a:r>
-          </a:p>
-        </p:txBody>
-      </p:sp>
-      <p:sp>
-        <p:nvSpPr>
-          <p:cNvPr id="18" name="text17" descr="sci-ppt:C2-E24-017"/>
-          <p:cNvSpPr txBox="1"/>
-          <p:nvPr/>
-        </p:nvSpPr>
-        <p:spPr>
-          <a:xfrm>
-            <a:off x="6156960" y="4974336"/>
-            <a:ext cx="5547360" cy="321259"/>
-          </a:xfrm>
-          <a:prstGeom prst="rect">
-            <a:avLst/>
-          </a:prstGeom>
-          <a:noFill/>
-          <a:effectLst/>
-        </p:spPr>
-        <p:txBody>
-          <a:bodyPr wrap="none" lIns="27432" rIns="27432" tIns="18288" bIns="18288" anchor="ctr">
-            <a:spAutoFit/>
-          </a:bodyPr>
-          <a:lstStyle/>
+              <a:t>Curve for the fixed PFP inventory of a 5 µm droplet (0.8535 ng) at 323 K. Expansion alone drops p by a factor 1000 for a tenfold</a:t>
+            </a:r>
+          </a:p>
           <a:p>
             <a:pPr algn="l">
               <a:spcAft>
@@ -3685,27 +5030,27 @@
               </a:spcAft>
             </a:pPr>
             <a:r>
-              <a:rPr sz="1632" b="0" i="0">
+              <a:rPr sz="1250" b="0" i="0">
                 <a:solidFill>
                   <a:srgbClr val="E7F0F3"/>
                 </a:solidFill>
                 <a:latin typeface="Arial"/>
               </a:rPr>
-              <a:t>T_b: common temperature</a:t>
-            </a:r>
-          </a:p>
-        </p:txBody>
-      </p:sp>
-      <p:sp>
-        <p:nvSpPr>
-          <p:cNvPr id="19" name="text18" descr="sci-ppt:C2-E24-018"/>
+              <a:t>radius.</a:t>
+            </a:r>
+          </a:p>
+        </p:txBody>
+      </p:sp>
+      <p:sp>
+        <p:nvSpPr>
+          <p:cNvPr id="53" name="C2-E24 text 51" descr="sci-ppt:o051"/>
           <p:cNvSpPr txBox="1"/>
           <p:nvPr/>
         </p:nvSpPr>
         <p:spPr>
           <a:xfrm>
-            <a:off x="6156960" y="5266944"/>
-            <a:ext cx="5547360" cy="321259"/>
+            <a:off x="320040" y="6510528"/>
+            <a:ext cx="11521440" cy="200660"/>
           </a:xfrm>
           <a:prstGeom prst="rect">
             <a:avLst/>
@@ -3714,7 +5059,7 @@
           <a:effectLst/>
         </p:spPr>
         <p:txBody>
-          <a:bodyPr wrap="none" lIns="27432" rIns="27432" tIns="18288" bIns="18288" anchor="ctr">
+          <a:bodyPr wrap="none" lIns="18288" rIns="18288" tIns="18288" bIns="18288" anchor="t">
             <a:spAutoFit/>
           </a:bodyPr>
           <a:lstStyle/>
@@ -3725,173 +5070,13 @@
               </a:spcAft>
             </a:pPr>
             <a:r>
-              <a:rPr sz="1632" b="0" i="0">
-                <a:solidFill>
-                  <a:srgbClr val="E7F0F3"/>
-                </a:solidFill>
-                <a:latin typeface="Arial"/>
-              </a:rPr>
-              <a:t>p_v,s: component pressure</a:t>
-            </a:r>
-          </a:p>
-        </p:txBody>
-      </p:sp>
-      <p:sp>
-        <p:nvSpPr>
-          <p:cNvPr id="20" name="text19" descr="sci-ppt:C2-E24-019"/>
-          <p:cNvSpPr txBox="1"/>
-          <p:nvPr/>
-        </p:nvSpPr>
-        <p:spPr>
-          <a:xfrm>
-            <a:off x="6156960" y="5559552"/>
-            <a:ext cx="5547360" cy="321259"/>
-          </a:xfrm>
-          <a:prstGeom prst="rect">
-            <a:avLst/>
-          </a:prstGeom>
-          <a:noFill/>
-          <a:effectLst/>
-        </p:spPr>
-        <p:txBody>
-          <a:bodyPr wrap="none" lIns="27432" rIns="27432" tIns="18288" bIns="18288" anchor="ctr">
-            <a:spAutoFit/>
-          </a:bodyPr>
-          <a:lstStyle/>
-          <a:p>
-            <a:pPr algn="l">
-              <a:spcAft>
-                <a:spcPts val="0"/>
-              </a:spcAft>
-            </a:pPr>
-            <a:r>
-              <a:rPr sz="1632" b="0" i="0">
-                <a:solidFill>
-                  <a:srgbClr val="E7F0F3"/>
-                </a:solidFill>
-                <a:latin typeface="Arial"/>
-              </a:rPr>
-              <a:t>R_u: gas constant</a:t>
-            </a:r>
-          </a:p>
-        </p:txBody>
-      </p:sp>
-      <p:sp>
-        <p:nvSpPr>
-          <p:cNvPr id="21" name="text20" descr="sci-ppt:C2-E24-020"/>
-          <p:cNvSpPr txBox="1"/>
-          <p:nvPr/>
-        </p:nvSpPr>
-        <p:spPr>
-          <a:xfrm>
-            <a:off x="6156960" y="5852160"/>
-            <a:ext cx="5547360" cy="321259"/>
-          </a:xfrm>
-          <a:prstGeom prst="rect">
-            <a:avLst/>
-          </a:prstGeom>
-          <a:noFill/>
-          <a:effectLst/>
-        </p:spPr>
-        <p:txBody>
-          <a:bodyPr wrap="none" lIns="27432" rIns="27432" tIns="18288" bIns="18288" anchor="ctr">
-            <a:spAutoFit/>
-          </a:bodyPr>
-          <a:lstStyle/>
-          <a:p>
-            <a:pPr algn="l">
-              <a:spcAft>
-                <a:spcPts val="0"/>
-              </a:spcAft>
-            </a:pPr>
-            <a:r>
-              <a:rPr sz="1632" b="0" i="0">
-                <a:solidFill>
-                  <a:srgbClr val="E7F0F3"/>
-                </a:solidFill>
-                <a:latin typeface="Arial"/>
-              </a:rPr>
-              <a:t>s = 1…N_s; P: EOS function</a:t>
-            </a:r>
-          </a:p>
-        </p:txBody>
-      </p:sp>
-      <p:sp>
-        <p:nvSpPr>
-          <p:cNvPr id="22" name="text21" descr="sci-ppt:C2-E24-021"/>
-          <p:cNvSpPr txBox="1"/>
-          <p:nvPr/>
-        </p:nvSpPr>
-        <p:spPr>
-          <a:xfrm>
-            <a:off x="365760" y="6339840"/>
-            <a:ext cx="11277600" cy="302361"/>
-          </a:xfrm>
-          <a:prstGeom prst="rect">
-            <a:avLst/>
-          </a:prstGeom>
-          <a:noFill/>
-          <a:effectLst/>
-        </p:spPr>
-        <p:txBody>
-          <a:bodyPr wrap="none" lIns="27432" rIns="27432" tIns="18288" bIns="18288" anchor="ctr">
-            <a:spAutoFit/>
-          </a:bodyPr>
-          <a:lstStyle/>
-          <a:p>
-            <a:pPr algn="l">
-              <a:spcAft>
-                <a:spcPts val="0"/>
-              </a:spcAft>
-            </a:pPr>
-            <a:r>
-              <a:rPr sz="1536" b="0" i="0">
+              <a:rPr sz="1000" b="0" i="0">
                 <a:solidFill>
                   <a:srgbClr val="B4C7D2"/>
                 </a:solidFill>
                 <a:latin typeface="Arial"/>
               </a:rPr>
-              <a:t>Permanent gas remains after condensable vapor is removed</a:t>
-            </a:r>
-          </a:p>
-        </p:txBody>
-      </p:sp>
-      <p:sp>
-        <p:nvSpPr>
-          <p:cNvPr id="23" name="text22" descr="sci-ppt:C2-E24-022"/>
-          <p:cNvSpPr txBox="1"/>
-          <p:nvPr/>
-        </p:nvSpPr>
-        <p:spPr>
-          <a:xfrm>
-            <a:off x="365760" y="6632448"/>
-            <a:ext cx="11277600" cy="302361"/>
-          </a:xfrm>
-          <a:prstGeom prst="rect">
-            <a:avLst/>
-          </a:prstGeom>
-          <a:noFill/>
-          <a:effectLst/>
-        </p:spPr>
-        <p:txBody>
-          <a:bodyPr wrap="none" lIns="27432" rIns="27432" tIns="18288" bIns="18288" anchor="ctr">
-            <a:spAutoFit/>
-          </a:bodyPr>
-          <a:lstStyle/>
-          <a:p>
-            <a:pPr algn="l">
-              <a:spcAft>
-                <a:spcPts val="0"/>
-              </a:spcAft>
-            </a:pPr>
-            <a:r>
-              <a:rPr sz="1536" b="0" i="0">
-                <a:solidFill>
-                  <a:srgbClr val="B4C7D2"/>
-                </a:solidFill>
-                <a:latin typeface="Arial"/>
-              </a:rPr>
-              <a:t>Dense compression requires a calibrated EOS</a:t>
+              <a:t>Ideal-gas control of Eq. C2-E24 with M_PFC = 0.2880343 kg/mol.</a:t>
             </a:r>
           </a:p>
         </p:txBody>
